--- a/Togo-environnement-hydrolique/rapport/Togo_Water_Sanitation_Report.pptx
+++ b/Togo-environnement-hydrolique/rapport/Togo_Water_Sanitation_Report.pptx
@@ -117,6 +117,411 @@
 </file>
 
 <file path=ppt/charts/chart1.xml><?xml version="1.0" encoding="utf-8"?>
+<c:chartSpace xmlns:c="http://schemas.openxmlformats.org/drawingml/2006/chart" xmlns:a="http://schemas.openxmlformats.org/drawingml/2006/main" xmlns:r="http://schemas.openxmlformats.org/officeDocument/2006/relationships">
+  <c:date1904 val="0"/>
+  <c:chart>
+    <c:title>
+      <c:tx>
+        <c:rich>
+          <a:bodyPr/>
+          <a:lstStyle/>
+          <a:p>
+            <a:r>
+              <a:rPr sz="1200"/>
+              <a:t>Share of population (%)</a:t>
+            </a:r>
+          </a:p>
+        </c:rich>
+      </c:tx>
+      <c:layout/>
+      <c:overlay val="0"/>
+    </c:title>
+    <c:autoTitleDeleted val="0"/>
+    <c:plotArea>
+      <c:barChart>
+        <c:barDir val="bar"/>
+        <c:grouping val="clustered"/>
+        <c:ser>
+          <c:idx val="0"/>
+          <c:order val="0"/>
+          <c:tx>
+            <c:strRef>
+              <c:f>Sheet1!$B$1</c:f>
+              <c:strCache>
+                <c:ptCount val="1"/>
+                <c:pt idx="0">
+                  <c:v>Share of population (%)</c:v>
+                </c:pt>
+              </c:strCache>
+            </c:strRef>
+          </c:tx>
+          <c:cat>
+            <c:strRef>
+              <c:f>Sheet1!$A$2:$A$4</c:f>
+              <c:strCache>
+                <c:ptCount val="3"/>
+                <c:pt idx="0">
+                  <c:v>under 1 km</c:v>
+                </c:pt>
+                <c:pt idx="1">
+                  <c:v>under 2.5 km</c:v>
+                </c:pt>
+                <c:pt idx="2">
+                  <c:v>under 5 km</c:v>
+                </c:pt>
+              </c:strCache>
+            </c:strRef>
+          </c:cat>
+          <c:val>
+            <c:numRef>
+              <c:f>Sheet1!$B$2:$B$4</c:f>
+              <c:numCache>
+                <c:formatCode>General</c:formatCode>
+                <c:ptCount val="3"/>
+                <c:pt idx="0">
+                  <c:v>5.4</c:v>
+                </c:pt>
+                <c:pt idx="1">
+                  <c:v>18.3</c:v>
+                </c:pt>
+                <c:pt idx="2">
+                  <c:v>32.3</c:v>
+                </c:pt>
+              </c:numCache>
+            </c:numRef>
+          </c:val>
+        </c:ser>
+        <c:axId val="-2068027336"/>
+        <c:axId val="-2113994440"/>
+      </c:barChart>
+      <c:catAx>
+        <c:axId val="-2068027336"/>
+        <c:scaling>
+          <c:orientation val="minMax"/>
+        </c:scaling>
+        <c:delete val="0"/>
+        <c:axPos val="l"/>
+        <c:majorTickMark val="out"/>
+        <c:minorTickMark val="none"/>
+        <c:tickLblPos val="nextTo"/>
+        <c:crossAx val="-2113994440"/>
+        <c:crosses val="autoZero"/>
+        <c:auto val="1"/>
+        <c:lblAlgn val="ctr"/>
+        <c:lblOffset val="100"/>
+        <c:noMultiLvlLbl val="0"/>
+      </c:catAx>
+      <c:valAx>
+        <c:axId val="-2113994440"/>
+        <c:scaling/>
+        <c:delete val="0"/>
+        <c:axPos val="b"/>
+        <c:majorGridlines/>
+        <c:majorTickMark val="out"/>
+        <c:minorTickMark val="none"/>
+        <c:tickLblPos val="nextTo"/>
+        <c:crossAx val="-2068027336"/>
+        <c:crosses val="autoZero"/>
+      </c:valAx>
+    </c:plotArea>
+    <c:dispBlanksAs val="gap"/>
+  </c:chart>
+  <c:txPr>
+    <a:bodyPr/>
+    <a:lstStyle/>
+    <a:p>
+      <a:pPr>
+        <a:defRPr sz="1000">
+          <a:solidFill>
+            <a:srgbClr val="475569"/>
+          </a:solidFill>
+          <a:latin typeface="Calibri"/>
+        </a:defRPr>
+      </a:pPr>
+      <a:endParaRPr lang="en-US"/>
+    </a:p>
+  </c:txPr>
+  <c:externalData r:id="rId1">
+    <c:autoUpdate val="0"/>
+  </c:externalData>
+</c:chartSpace>
+</file>
+
+<file path=ppt/charts/chart2.xml><?xml version="1.0" encoding="utf-8"?>
+<c:chartSpace xmlns:c="http://schemas.openxmlformats.org/drawingml/2006/chart" xmlns:a="http://schemas.openxmlformats.org/drawingml/2006/main" xmlns:r="http://schemas.openxmlformats.org/officeDocument/2006/relationships">
+  <c:date1904 val="0"/>
+  <c:chart>
+    <c:title>
+      <c:tx>
+        <c:rich>
+          <a:bodyPr/>
+          <a:lstStyle/>
+          <a:p>
+            <a:r>
+              <a:rPr sz="1200"/>
+              <a:t>Facilities with a maintenance plan (%)</a:t>
+            </a:r>
+          </a:p>
+        </c:rich>
+      </c:tx>
+      <c:layout/>
+      <c:overlay val="0"/>
+    </c:title>
+    <c:autoTitleDeleted val="0"/>
+    <c:plotArea>
+      <c:barChart>
+        <c:barDir val="bar"/>
+        <c:grouping val="clustered"/>
+        <c:ser>
+          <c:idx val="0"/>
+          <c:order val="0"/>
+          <c:tx>
+            <c:strRef>
+              <c:f>Sheet1!$B$1</c:f>
+              <c:strCache>
+                <c:ptCount val="1"/>
+                <c:pt idx="0">
+                  <c:v>Facilities with a maintenance plan (%)</c:v>
+                </c:pt>
+              </c:strCache>
+            </c:strRef>
+          </c:tx>
+          <c:cat>
+            <c:strRef>
+              <c:f>Sheet1!$A$2:$A$4</c:f>
+              <c:strCache>
+                <c:ptCount val="3"/>
+                <c:pt idx="0">
+                  <c:v>Kara</c:v>
+                </c:pt>
+                <c:pt idx="1">
+                  <c:v>Centrale</c:v>
+                </c:pt>
+                <c:pt idx="2">
+                  <c:v>Savanes</c:v>
+                </c:pt>
+              </c:strCache>
+            </c:strRef>
+          </c:cat>
+          <c:val>
+            <c:numRef>
+              <c:f>Sheet1!$B$2:$B$4</c:f>
+              <c:numCache>
+                <c:formatCode>General</c:formatCode>
+                <c:ptCount val="3"/>
+                <c:pt idx="0">
+                  <c:v>100.0</c:v>
+                </c:pt>
+                <c:pt idx="1">
+                  <c:v>46.2</c:v>
+                </c:pt>
+                <c:pt idx="2">
+                  <c:v>13.5</c:v>
+                </c:pt>
+              </c:numCache>
+            </c:numRef>
+          </c:val>
+        </c:ser>
+        <c:axId val="-2068027336"/>
+        <c:axId val="-2113994440"/>
+      </c:barChart>
+      <c:catAx>
+        <c:axId val="-2068027336"/>
+        <c:scaling>
+          <c:orientation val="minMax"/>
+        </c:scaling>
+        <c:delete val="0"/>
+        <c:axPos val="l"/>
+        <c:majorTickMark val="out"/>
+        <c:minorTickMark val="none"/>
+        <c:tickLblPos val="nextTo"/>
+        <c:crossAx val="-2113994440"/>
+        <c:crosses val="autoZero"/>
+        <c:auto val="1"/>
+        <c:lblAlgn val="ctr"/>
+        <c:lblOffset val="100"/>
+        <c:noMultiLvlLbl val="0"/>
+      </c:catAx>
+      <c:valAx>
+        <c:axId val="-2113994440"/>
+        <c:scaling/>
+        <c:delete val="0"/>
+        <c:axPos val="b"/>
+        <c:majorGridlines/>
+        <c:majorTickMark val="out"/>
+        <c:minorTickMark val="none"/>
+        <c:tickLblPos val="nextTo"/>
+        <c:crossAx val="-2068027336"/>
+        <c:crosses val="autoZero"/>
+      </c:valAx>
+    </c:plotArea>
+    <c:dispBlanksAs val="gap"/>
+  </c:chart>
+  <c:txPr>
+    <a:bodyPr/>
+    <a:lstStyle/>
+    <a:p>
+      <a:pPr>
+        <a:defRPr sz="1000">
+          <a:solidFill>
+            <a:srgbClr val="475569"/>
+          </a:solidFill>
+          <a:latin typeface="Calibri"/>
+        </a:defRPr>
+      </a:pPr>
+      <a:endParaRPr lang="en-US"/>
+    </a:p>
+  </c:txPr>
+  <c:externalData r:id="rId1">
+    <c:autoUpdate val="0"/>
+  </c:externalData>
+</c:chartSpace>
+</file>
+
+<file path=ppt/charts/chart3.xml><?xml version="1.0" encoding="utf-8"?>
+<c:chartSpace xmlns:c="http://schemas.openxmlformats.org/drawingml/2006/chart" xmlns:a="http://schemas.openxmlformats.org/drawingml/2006/main" xmlns:r="http://schemas.openxmlformats.org/officeDocument/2006/relationships">
+  <c:date1904 val="0"/>
+  <c:chart>
+    <c:title>
+      <c:tx>
+        <c:rich>
+          <a:bodyPr/>
+          <a:lstStyle/>
+          <a:p>
+            <a:r>
+              <a:rPr sz="1200"/>
+              <a:t>Inhabitants per facility</a:t>
+            </a:r>
+          </a:p>
+        </c:rich>
+      </c:tx>
+      <c:layout/>
+      <c:overlay val="0"/>
+    </c:title>
+    <c:autoTitleDeleted val="0"/>
+    <c:plotArea>
+      <c:barChart>
+        <c:barDir val="bar"/>
+        <c:grouping val="clustered"/>
+        <c:ser>
+          <c:idx val="0"/>
+          <c:order val="0"/>
+          <c:tx>
+            <c:strRef>
+              <c:f>Sheet1!$B$1</c:f>
+              <c:strCache>
+                <c:ptCount val="1"/>
+                <c:pt idx="0">
+                  <c:v>Inhabitants per facility</c:v>
+                </c:pt>
+              </c:strCache>
+            </c:strRef>
+          </c:tx>
+          <c:cat>
+            <c:strRef>
+              <c:f>Sheet1!$A$2:$A$6</c:f>
+              <c:strCache>
+                <c:ptCount val="5"/>
+                <c:pt idx="0">
+                  <c:v>Savanes</c:v>
+                </c:pt>
+                <c:pt idx="1">
+                  <c:v>Maritime</c:v>
+                </c:pt>
+                <c:pt idx="2">
+                  <c:v>Centrale</c:v>
+                </c:pt>
+                <c:pt idx="3">
+                  <c:v>Kara</c:v>
+                </c:pt>
+                <c:pt idx="4">
+                  <c:v>Plateaux</c:v>
+                </c:pt>
+              </c:strCache>
+            </c:strRef>
+          </c:cat>
+          <c:val>
+            <c:numRef>
+              <c:f>Sheet1!$B$2:$B$6</c:f>
+              <c:numCache>
+                <c:formatCode>General</c:formatCode>
+                <c:ptCount val="5"/>
+                <c:pt idx="0">
+                  <c:v>6819.0</c:v>
+                </c:pt>
+                <c:pt idx="1">
+                  <c:v>55229.0</c:v>
+                </c:pt>
+                <c:pt idx="2">
+                  <c:v>56629.0</c:v>
+                </c:pt>
+                <c:pt idx="3">
+                  <c:v>75843.0</c:v>
+                </c:pt>
+                <c:pt idx="4">
+                  <c:v>1669612.0</c:v>
+                </c:pt>
+              </c:numCache>
+            </c:numRef>
+          </c:val>
+        </c:ser>
+        <c:axId val="-2068027336"/>
+        <c:axId val="-2113994440"/>
+      </c:barChart>
+      <c:catAx>
+        <c:axId val="-2068027336"/>
+        <c:scaling>
+          <c:orientation val="minMax"/>
+        </c:scaling>
+        <c:delete val="0"/>
+        <c:axPos val="l"/>
+        <c:majorTickMark val="out"/>
+        <c:minorTickMark val="none"/>
+        <c:tickLblPos val="nextTo"/>
+        <c:crossAx val="-2113994440"/>
+        <c:crosses val="autoZero"/>
+        <c:auto val="1"/>
+        <c:lblAlgn val="ctr"/>
+        <c:lblOffset val="100"/>
+        <c:noMultiLvlLbl val="0"/>
+      </c:catAx>
+      <c:valAx>
+        <c:axId val="-2113994440"/>
+        <c:scaling/>
+        <c:delete val="0"/>
+        <c:axPos val="b"/>
+        <c:majorGridlines/>
+        <c:majorTickMark val="out"/>
+        <c:minorTickMark val="none"/>
+        <c:tickLblPos val="nextTo"/>
+        <c:crossAx val="-2068027336"/>
+        <c:crosses val="autoZero"/>
+      </c:valAx>
+    </c:plotArea>
+    <c:dispBlanksAs val="gap"/>
+  </c:chart>
+  <c:txPr>
+    <a:bodyPr/>
+    <a:lstStyle/>
+    <a:p>
+      <a:pPr>
+        <a:defRPr sz="1000">
+          <a:solidFill>
+            <a:srgbClr val="475569"/>
+          </a:solidFill>
+          <a:latin typeface="Calibri"/>
+        </a:defRPr>
+      </a:pPr>
+      <a:endParaRPr lang="en-US"/>
+    </a:p>
+  </c:txPr>
+  <c:externalData r:id="rId1">
+    <c:autoUpdate val="0"/>
+  </c:externalData>
+</c:chartSpace>
+</file>
+
+<file path=ppt/charts/chart4.xml><?xml version="1.0" encoding="utf-8"?>
 <c:chartSpace xmlns:c="http://schemas.openxmlformats.org/drawingml/2006/chart" xmlns:a="http://schemas.openxmlformats.org/drawingml/2006/main" xmlns:r="http://schemas.openxmlformats.org/officeDocument/2006/relationships">
   <c:date1904 val="0"/>
   <c:chart>
@@ -259,293 +664,7 @@
 </c:chartSpace>
 </file>
 
-<file path=ppt/charts/chart2.xml><?xml version="1.0" encoding="utf-8"?>
-<c:chartSpace xmlns:c="http://schemas.openxmlformats.org/drawingml/2006/chart" xmlns:a="http://schemas.openxmlformats.org/drawingml/2006/main" xmlns:r="http://schemas.openxmlformats.org/officeDocument/2006/relationships">
-  <c:date1904 val="0"/>
-  <c:chart>
-    <c:title>
-      <c:tx>
-        <c:rich>
-          <a:bodyPr/>
-          <a:lstStyle/>
-          <a:p>
-            <a:r>
-              <a:rPr sz="1200"/>
-              <a:t>Inhabitants per facility</a:t>
-            </a:r>
-          </a:p>
-        </c:rich>
-      </c:tx>
-      <c:layout/>
-      <c:overlay val="0"/>
-    </c:title>
-    <c:autoTitleDeleted val="0"/>
-    <c:plotArea>
-      <c:barChart>
-        <c:barDir val="bar"/>
-        <c:grouping val="clustered"/>
-        <c:ser>
-          <c:idx val="0"/>
-          <c:order val="0"/>
-          <c:tx>
-            <c:strRef>
-              <c:f>Sheet1!$B$1</c:f>
-              <c:strCache>
-                <c:ptCount val="1"/>
-                <c:pt idx="0">
-                  <c:v>Inhabitants per facility</c:v>
-                </c:pt>
-              </c:strCache>
-            </c:strRef>
-          </c:tx>
-          <c:cat>
-            <c:strRef>
-              <c:f>Sheet1!$A$2:$A$6</c:f>
-              <c:strCache>
-                <c:ptCount val="5"/>
-                <c:pt idx="0">
-                  <c:v>Savanes</c:v>
-                </c:pt>
-                <c:pt idx="1">
-                  <c:v>Maritime</c:v>
-                </c:pt>
-                <c:pt idx="2">
-                  <c:v>Centrale</c:v>
-                </c:pt>
-                <c:pt idx="3">
-                  <c:v>Kara</c:v>
-                </c:pt>
-                <c:pt idx="4">
-                  <c:v>Plateaux</c:v>
-                </c:pt>
-              </c:strCache>
-            </c:strRef>
-          </c:cat>
-          <c:val>
-            <c:numRef>
-              <c:f>Sheet1!$B$2:$B$6</c:f>
-              <c:numCache>
-                <c:formatCode>General</c:formatCode>
-                <c:ptCount val="5"/>
-                <c:pt idx="0">
-                  <c:v>6819.0</c:v>
-                </c:pt>
-                <c:pt idx="1">
-                  <c:v>55229.0</c:v>
-                </c:pt>
-                <c:pt idx="2">
-                  <c:v>56629.0</c:v>
-                </c:pt>
-                <c:pt idx="3">
-                  <c:v>75843.0</c:v>
-                </c:pt>
-                <c:pt idx="4">
-                  <c:v>1669612.0</c:v>
-                </c:pt>
-              </c:numCache>
-            </c:numRef>
-          </c:val>
-        </c:ser>
-        <c:axId val="-2068027336"/>
-        <c:axId val="-2113994440"/>
-      </c:barChart>
-      <c:catAx>
-        <c:axId val="-2068027336"/>
-        <c:scaling>
-          <c:orientation val="minMax"/>
-        </c:scaling>
-        <c:delete val="0"/>
-        <c:axPos val="l"/>
-        <c:majorTickMark val="out"/>
-        <c:minorTickMark val="none"/>
-        <c:tickLblPos val="nextTo"/>
-        <c:crossAx val="-2113994440"/>
-        <c:crosses val="autoZero"/>
-        <c:auto val="1"/>
-        <c:lblAlgn val="ctr"/>
-        <c:lblOffset val="100"/>
-        <c:noMultiLvlLbl val="0"/>
-      </c:catAx>
-      <c:valAx>
-        <c:axId val="-2113994440"/>
-        <c:scaling/>
-        <c:delete val="0"/>
-        <c:axPos val="b"/>
-        <c:majorGridlines/>
-        <c:majorTickMark val="out"/>
-        <c:minorTickMark val="none"/>
-        <c:tickLblPos val="nextTo"/>
-        <c:crossAx val="-2068027336"/>
-        <c:crosses val="autoZero"/>
-      </c:valAx>
-    </c:plotArea>
-    <c:dispBlanksAs val="gap"/>
-  </c:chart>
-  <c:txPr>
-    <a:bodyPr/>
-    <a:lstStyle/>
-    <a:p>
-      <a:pPr>
-        <a:defRPr sz="1000">
-          <a:solidFill>
-            <a:srgbClr val="475569"/>
-          </a:solidFill>
-          <a:latin typeface="Calibri"/>
-        </a:defRPr>
-      </a:pPr>
-      <a:endParaRPr lang="en-US"/>
-    </a:p>
-  </c:txPr>
-  <c:externalData r:id="rId1">
-    <c:autoUpdate val="0"/>
-  </c:externalData>
-</c:chartSpace>
-</file>
-
-<file path=ppt/charts/chart3.xml><?xml version="1.0" encoding="utf-8"?>
-<c:chartSpace xmlns:c="http://schemas.openxmlformats.org/drawingml/2006/chart" xmlns:a="http://schemas.openxmlformats.org/drawingml/2006/main" xmlns:r="http://schemas.openxmlformats.org/officeDocument/2006/relationships">
-  <c:date1904 val="0"/>
-  <c:chart>
-    <c:title>
-      <c:tx>
-        <c:rich>
-          <a:bodyPr/>
-          <a:lstStyle/>
-          <a:p>
-            <a:r>
-              <a:rPr sz="1200"/>
-              <a:t>Equipped share (%)</a:t>
-            </a:r>
-          </a:p>
-        </c:rich>
-      </c:tx>
-      <c:layout/>
-      <c:overlay val="0"/>
-    </c:title>
-    <c:autoTitleDeleted val="0"/>
-    <c:plotArea>
-      <c:barChart>
-        <c:barDir val="bar"/>
-        <c:grouping val="clustered"/>
-        <c:ser>
-          <c:idx val="0"/>
-          <c:order val="0"/>
-          <c:tx>
-            <c:strRef>
-              <c:f>Sheet1!$B$1</c:f>
-              <c:strCache>
-                <c:ptCount val="1"/>
-                <c:pt idx="0">
-                  <c:v>Equipped share (%)</c:v>
-                </c:pt>
-              </c:strCache>
-            </c:strRef>
-          </c:tx>
-          <c:cat>
-            <c:strRef>
-              <c:f>Sheet1!$A$2:$A$6</c:f>
-              <c:strCache>
-                <c:ptCount val="5"/>
-                <c:pt idx="0">
-                  <c:v>Very low</c:v>
-                </c:pt>
-                <c:pt idx="1">
-                  <c:v>Low</c:v>
-                </c:pt>
-                <c:pt idx="2">
-                  <c:v>Medium</c:v>
-                </c:pt>
-                <c:pt idx="3">
-                  <c:v>High</c:v>
-                </c:pt>
-                <c:pt idx="4">
-                  <c:v>Very high</c:v>
-                </c:pt>
-              </c:strCache>
-            </c:strRef>
-          </c:cat>
-          <c:val>
-            <c:numRef>
-              <c:f>Sheet1!$B$2:$B$6</c:f>
-              <c:numCache>
-                <c:formatCode>General</c:formatCode>
-                <c:ptCount val="5"/>
-                <c:pt idx="0">
-                  <c:v>13.2</c:v>
-                </c:pt>
-                <c:pt idx="1">
-                  <c:v>13.8</c:v>
-                </c:pt>
-                <c:pt idx="2">
-                  <c:v>24.2</c:v>
-                </c:pt>
-                <c:pt idx="3">
-                  <c:v>20.0</c:v>
-                </c:pt>
-                <c:pt idx="4">
-                  <c:v>42.9</c:v>
-                </c:pt>
-              </c:numCache>
-            </c:numRef>
-          </c:val>
-        </c:ser>
-        <c:axId val="-2068027336"/>
-        <c:axId val="-2113994440"/>
-      </c:barChart>
-      <c:catAx>
-        <c:axId val="-2068027336"/>
-        <c:scaling>
-          <c:orientation val="minMax"/>
-        </c:scaling>
-        <c:delete val="0"/>
-        <c:axPos val="l"/>
-        <c:majorTickMark val="out"/>
-        <c:minorTickMark val="none"/>
-        <c:tickLblPos val="nextTo"/>
-        <c:crossAx val="-2113994440"/>
-        <c:crosses val="autoZero"/>
-        <c:auto val="1"/>
-        <c:lblAlgn val="ctr"/>
-        <c:lblOffset val="100"/>
-        <c:noMultiLvlLbl val="0"/>
-      </c:catAx>
-      <c:valAx>
-        <c:axId val="-2113994440"/>
-        <c:scaling/>
-        <c:delete val="0"/>
-        <c:axPos val="b"/>
-        <c:majorGridlines/>
-        <c:majorTickMark val="out"/>
-        <c:minorTickMark val="none"/>
-        <c:tickLblPos val="nextTo"/>
-        <c:crossAx val="-2068027336"/>
-        <c:crosses val="autoZero"/>
-      </c:valAx>
-    </c:plotArea>
-    <c:dispBlanksAs val="gap"/>
-  </c:chart>
-  <c:txPr>
-    <a:bodyPr/>
-    <a:lstStyle/>
-    <a:p>
-      <a:pPr>
-        <a:defRPr sz="1000">
-          <a:solidFill>
-            <a:srgbClr val="475569"/>
-          </a:solidFill>
-          <a:latin typeface="Calibri"/>
-        </a:defRPr>
-      </a:pPr>
-      <a:endParaRPr lang="en-US"/>
-    </a:p>
-  </c:txPr>
-  <c:externalData r:id="rId1">
-    <c:autoUpdate val="0"/>
-  </c:externalData>
-</c:chartSpace>
-</file>
-
-<file path=ppt/charts/chart4.xml><?xml version="1.0" encoding="utf-8"?>
+<file path=ppt/charts/chart5.xml><?xml version="1.0" encoding="utf-8"?>
 <c:chartSpace xmlns:c="http://schemas.openxmlformats.org/drawingml/2006/chart" xmlns:a="http://schemas.openxmlformats.org/drawingml/2006/main" xmlns:r="http://schemas.openxmlformats.org/officeDocument/2006/relationships">
   <c:date1904 val="0"/>
   <c:chart>
@@ -627,6 +746,280 @@
                 </c:pt>
                 <c:pt idx="4">
                   <c:v>7072.0</c:v>
+                </c:pt>
+              </c:numCache>
+            </c:numRef>
+          </c:val>
+        </c:ser>
+        <c:axId val="-2068027336"/>
+        <c:axId val="-2113994440"/>
+      </c:barChart>
+      <c:catAx>
+        <c:axId val="-2068027336"/>
+        <c:scaling>
+          <c:orientation val="minMax"/>
+        </c:scaling>
+        <c:delete val="0"/>
+        <c:axPos val="l"/>
+        <c:majorTickMark val="out"/>
+        <c:minorTickMark val="none"/>
+        <c:tickLblPos val="nextTo"/>
+        <c:crossAx val="-2113994440"/>
+        <c:crosses val="autoZero"/>
+        <c:auto val="1"/>
+        <c:lblAlgn val="ctr"/>
+        <c:lblOffset val="100"/>
+        <c:noMultiLvlLbl val="0"/>
+      </c:catAx>
+      <c:valAx>
+        <c:axId val="-2113994440"/>
+        <c:scaling/>
+        <c:delete val="0"/>
+        <c:axPos val="b"/>
+        <c:majorGridlines/>
+        <c:majorTickMark val="out"/>
+        <c:minorTickMark val="none"/>
+        <c:tickLblPos val="nextTo"/>
+        <c:crossAx val="-2068027336"/>
+        <c:crosses val="autoZero"/>
+      </c:valAx>
+    </c:plotArea>
+    <c:dispBlanksAs val="gap"/>
+  </c:chart>
+  <c:txPr>
+    <a:bodyPr/>
+    <a:lstStyle/>
+    <a:p>
+      <a:pPr>
+        <a:defRPr sz="1000">
+          <a:solidFill>
+            <a:srgbClr val="475569"/>
+          </a:solidFill>
+          <a:latin typeface="Calibri"/>
+        </a:defRPr>
+      </a:pPr>
+      <a:endParaRPr lang="en-US"/>
+    </a:p>
+  </c:txPr>
+  <c:externalData r:id="rId1">
+    <c:autoUpdate val="0"/>
+  </c:externalData>
+</c:chartSpace>
+</file>
+
+<file path=ppt/charts/chart6.xml><?xml version="1.0" encoding="utf-8"?>
+<c:chartSpace xmlns:c="http://schemas.openxmlformats.org/drawingml/2006/chart" xmlns:a="http://schemas.openxmlformats.org/drawingml/2006/main" xmlns:r="http://schemas.openxmlformats.org/officeDocument/2006/relationships">
+  <c:date1904 val="0"/>
+  <c:chart>
+    <c:title>
+      <c:tx>
+        <c:rich>
+          <a:bodyPr/>
+          <a:lstStyle/>
+          <a:p>
+            <a:r>
+              <a:rPr sz="1200"/>
+              <a:t>Facilities to build</a:t>
+            </a:r>
+          </a:p>
+        </c:rich>
+      </c:tx>
+      <c:layout/>
+      <c:overlay val="0"/>
+    </c:title>
+    <c:autoTitleDeleted val="0"/>
+    <c:plotArea>
+      <c:barChart>
+        <c:barDir val="bar"/>
+        <c:grouping val="clustered"/>
+        <c:ser>
+          <c:idx val="0"/>
+          <c:order val="0"/>
+          <c:tx>
+            <c:strRef>
+              <c:f>Sheet1!$B$1</c:f>
+              <c:strCache>
+                <c:ptCount val="1"/>
+                <c:pt idx="0">
+                  <c:v>Facilities to build</c:v>
+                </c:pt>
+              </c:strCache>
+            </c:strRef>
+          </c:tx>
+          <c:cat>
+            <c:strRef>
+              <c:f>Sheet1!$A$2:$A$4</c:f>
+              <c:strCache>
+                <c:ptCount val="3"/>
+                <c:pt idx="0">
+                  <c:v>1 per 300 people</c:v>
+                </c:pt>
+                <c:pt idx="1">
+                  <c:v>1 per 1,000 people</c:v>
+                </c:pt>
+                <c:pt idx="2">
+                  <c:v>1 per 5,000 people</c:v>
+                </c:pt>
+              </c:strCache>
+            </c:strRef>
+          </c:cat>
+          <c:val>
+            <c:numRef>
+              <c:f>Sheet1!$B$2:$B$4</c:f>
+              <c:numCache>
+                <c:formatCode>General</c:formatCode>
+                <c:ptCount val="3"/>
+                <c:pt idx="0">
+                  <c:v>26949</c:v>
+                </c:pt>
+                <c:pt idx="1">
+                  <c:v>7886</c:v>
+                </c:pt>
+                <c:pt idx="2">
+                  <c:v>1350</c:v>
+                </c:pt>
+              </c:numCache>
+            </c:numRef>
+          </c:val>
+        </c:ser>
+        <c:axId val="-2068027336"/>
+        <c:axId val="-2113994440"/>
+      </c:barChart>
+      <c:catAx>
+        <c:axId val="-2068027336"/>
+        <c:scaling>
+          <c:orientation val="minMax"/>
+        </c:scaling>
+        <c:delete val="0"/>
+        <c:axPos val="l"/>
+        <c:majorTickMark val="out"/>
+        <c:minorTickMark val="none"/>
+        <c:tickLblPos val="nextTo"/>
+        <c:crossAx val="-2113994440"/>
+        <c:crosses val="autoZero"/>
+        <c:auto val="1"/>
+        <c:lblAlgn val="ctr"/>
+        <c:lblOffset val="100"/>
+        <c:noMultiLvlLbl val="0"/>
+      </c:catAx>
+      <c:valAx>
+        <c:axId val="-2113994440"/>
+        <c:scaling/>
+        <c:delete val="0"/>
+        <c:axPos val="b"/>
+        <c:majorGridlines/>
+        <c:majorTickMark val="out"/>
+        <c:minorTickMark val="none"/>
+        <c:tickLblPos val="nextTo"/>
+        <c:crossAx val="-2068027336"/>
+        <c:crosses val="autoZero"/>
+      </c:valAx>
+    </c:plotArea>
+    <c:dispBlanksAs val="gap"/>
+  </c:chart>
+  <c:txPr>
+    <a:bodyPr/>
+    <a:lstStyle/>
+    <a:p>
+      <a:pPr>
+        <a:defRPr sz="1000">
+          <a:solidFill>
+            <a:srgbClr val="475569"/>
+          </a:solidFill>
+          <a:latin typeface="Calibri"/>
+        </a:defRPr>
+      </a:pPr>
+      <a:endParaRPr lang="en-US"/>
+    </a:p>
+  </c:txPr>
+  <c:externalData r:id="rId1">
+    <c:autoUpdate val="0"/>
+  </c:externalData>
+</c:chartSpace>
+</file>
+
+<file path=ppt/charts/chart7.xml><?xml version="1.0" encoding="utf-8"?>
+<c:chartSpace xmlns:c="http://schemas.openxmlformats.org/drawingml/2006/chart" xmlns:a="http://schemas.openxmlformats.org/drawingml/2006/main" xmlns:r="http://schemas.openxmlformats.org/officeDocument/2006/relationships">
+  <c:date1904 val="0"/>
+  <c:chart>
+    <c:title>
+      <c:tx>
+        <c:rich>
+          <a:bodyPr/>
+          <a:lstStyle/>
+          <a:p>
+            <a:r>
+              <a:rPr sz="1200"/>
+              <a:t>Billion FCFA per year</a:t>
+            </a:r>
+          </a:p>
+        </c:rich>
+      </c:tx>
+      <c:layout/>
+      <c:overlay val="0"/>
+    </c:title>
+    <c:autoTitleDeleted val="0"/>
+    <c:plotArea>
+      <c:barChart>
+        <c:barDir val="bar"/>
+        <c:grouping val="clustered"/>
+        <c:ser>
+          <c:idx val="0"/>
+          <c:order val="0"/>
+          <c:tx>
+            <c:strRef>
+              <c:f>Sheet1!$B$1</c:f>
+              <c:strCache>
+                <c:ptCount val="1"/>
+                <c:pt idx="0">
+                  <c:v>Billion FCFA per year</c:v>
+                </c:pt>
+              </c:strCache>
+            </c:strRef>
+          </c:tx>
+          <c:cat>
+            <c:strRef>
+              <c:f>Sheet1!$A$2:$A$6</c:f>
+              <c:strCache>
+                <c:ptCount val="5"/>
+                <c:pt idx="0">
+                  <c:v>2027</c:v>
+                </c:pt>
+                <c:pt idx="1">
+                  <c:v>2028</c:v>
+                </c:pt>
+                <c:pt idx="2">
+                  <c:v>2029</c:v>
+                </c:pt>
+                <c:pt idx="3">
+                  <c:v>2030</c:v>
+                </c:pt>
+                <c:pt idx="4">
+                  <c:v>2031</c:v>
+                </c:pt>
+              </c:strCache>
+            </c:strRef>
+          </c:cat>
+          <c:val>
+            <c:numRef>
+              <c:f>Sheet1!$B$2:$B$6</c:f>
+              <c:numCache>
+                <c:formatCode>General</c:formatCode>
+                <c:ptCount val="5"/>
+                <c:pt idx="0">
+                  <c:v>5.46</c:v>
+                </c:pt>
+                <c:pt idx="1">
+                  <c:v>5.53</c:v>
+                </c:pt>
+                <c:pt idx="2">
+                  <c:v>5.49</c:v>
+                </c:pt>
+                <c:pt idx="3">
+                  <c:v>5.54</c:v>
+                </c:pt>
+                <c:pt idx="4">
+                  <c:v>5.54</c:v>
                 </c:pt>
               </c:numCache>
             </c:numRef>
@@ -3735,7 +4128,7 @@
                 </a:solidFill>
                 <a:latin typeface="Calibri"/>
               </a:rPr>
-              <a:t>388 cantons mapped. Four percent of them hold 35 % of the population, and the national inventory does not cover them.</a:t>
+              <a:t>388 cantons mapped, and a median 26 kilometres to the nearest recorded facility. Four percent of cantons hold 35% of the exposed population, and the national inventory does not cover them.</a:t>
             </a:r>
           </a:p>
           <a:p>
@@ -3924,7 +4317,7 @@
                 </a:solidFill>
                 <a:latin typeface="Calibri"/>
               </a:rPr>
-              <a:t>Risk is concentrated, funding is not</a:t>
+              <a:t>Risk is concentrated, allocation does not follow it</a:t>
             </a:r>
           </a:p>
           <a:p>
@@ -3940,7 +4333,7 @@
                 </a:solidFill>
                 <a:latin typeface="Calibri"/>
               </a:rPr>
-              <a:t>Seventeen cantons hold a third of the country; risk does not explain who receives a facility; and a borehole's cost is independent of how many it serves. These three results hold on the published data.</a:t>
+              <a:t>Seventeen cantons hold a third of the country. Where facilities stand is better explained by programme footprints than by need, and the median distance to water says the same thing differently. The catch-up is costed, dated and placed canton by canton.</a:t>
             </a:r>
           </a:p>
         </p:txBody>
@@ -4321,7 +4714,7 @@
                 </a:solidFill>
                 <a:latin typeface="Calibri"/>
               </a:rPr>
-              <a:t>five tabular, two geographic layers</a:t>
+              <a:t>six cleaned datasets, from seven loaded resources</a:t>
             </a:r>
           </a:p>
         </p:txBody>
@@ -4886,7 +5279,7 @@
                 </a:solidFill>
                 <a:latin typeface="Calibri"/>
               </a:rPr>
-              <a:t>3 · Four percent of cantons, a third of the country</a:t>
+              <a:t>3 · Where the water is, and how far away</a:t>
             </a:r>
           </a:p>
           <a:p>
@@ -4902,7 +5295,7 @@
                 </a:solidFill>
                 <a:latin typeface="Calibri"/>
               </a:rPr>
-              <a:t>Population by official flood-risk class</a:t>
+              <a:t>Population reached, by distance to the nearest recorded facility</a:t>
             </a:r>
           </a:p>
         </p:txBody>
@@ -4988,7 +5381,7 @@
                 </a:solidFill>
                 <a:latin typeface="Calibri"/>
               </a:rPr>
-              <a:t>High-risk cantons</a:t>
+              <a:t>Median distance to water</a:t>
             </a:r>
           </a:p>
           <a:p>
@@ -5004,7 +5397,7 @@
                 </a:solidFill>
                 <a:latin typeface="Calibri"/>
               </a:rPr>
-              <a:t>17</a:t>
+              <a:t>26 km</a:t>
             </a:r>
           </a:p>
           <a:p>
@@ -5020,7 +5413,7 @@
                 </a:solidFill>
                 <a:latin typeface="Calibri"/>
               </a:rPr>
-              <a:t>4 % of the national grid</a:t>
+              <a:t>from a canton to the nearest recorded facility</a:t>
             </a:r>
           </a:p>
         </p:txBody>
@@ -5059,7 +5452,7 @@
                 </a:solidFill>
                 <a:latin typeface="Calibri"/>
               </a:rPr>
-              <a:t>Exposed inhabitants</a:t>
+              <a:t>Cantons beyond 10 km</a:t>
             </a:r>
           </a:p>
           <a:p>
@@ -5075,7 +5468,7 @@
                 </a:solidFill>
                 <a:latin typeface="Calibri"/>
               </a:rPr>
-              <a:t>2.9 M</a:t>
+              <a:t>288</a:t>
             </a:r>
           </a:p>
           <a:p>
@@ -5091,7 +5484,7 @@
                 </a:solidFill>
                 <a:latin typeface="Calibri"/>
               </a:rPr>
-              <a:t>35 % of the population</a:t>
+              <a:t>53% of the country's population</a:t>
             </a:r>
           </a:p>
         </p:txBody>
@@ -5130,7 +5523,7 @@
                 </a:solidFill>
                 <a:latin typeface="Calibri"/>
               </a:rPr>
-              <a:t>What this chart forbids saying</a:t>
+              <a:t>What the distance measures</a:t>
             </a:r>
           </a:p>
           <a:p>
@@ -5146,7 +5539,7 @@
                 </a:solidFill>
                 <a:latin typeface="Calibri"/>
               </a:rPr>
-              <a:t>« The risk is marginal » ?</a:t>
+              <a:t>Poorly served, or poorly recorded?</a:t>
             </a:r>
           </a:p>
           <a:p>
@@ -5162,7 +5555,7 @@
                 </a:solidFill>
                 <a:latin typeface="Calibri"/>
               </a:rPr>
-              <a:t>No — it is concentrated</a:t>
+              <a:t>R = 0.41 — facilities are clustered</a:t>
             </a:r>
           </a:p>
           <a:p>
@@ -5178,7 +5571,7 @@
                 </a:solidFill>
                 <a:latin typeface="Calibri"/>
               </a:rPr>
-              <a:t>Counting cantons would give 17 of 388 and make this look anecdotal. Counting people says the opposite.</a:t>
+              <a:t>The Clark-Evans index is 1 when points fall at random; below 0.5 they are clustered. So this distance measures the inventory as much as the service: a canton with no recorded facility is not a canton without water, it is a canton whose water nobody publishes.</a:t>
             </a:r>
           </a:p>
         </p:txBody>
@@ -5269,7 +5662,7 @@
                 </a:solidFill>
                 <a:latin typeface="Calibri"/>
               </a:rPr>
-              <a:t>4 · What the corpus does not say</a:t>
+              <a:t>4 · Facility condition: the missing field</a:t>
             </a:r>
           </a:p>
           <a:p>
@@ -5285,7 +5678,7 @@
                 </a:solidFill>
                 <a:latin typeface="Calibri"/>
               </a:rPr>
-              <a:t>Two missing pieces, both methodological</a:t>
+              <a:t>No operating status in the corpus — two proxies, and what they cannot replace</a:t>
             </a:r>
           </a:p>
         </p:txBody>
@@ -5319,16 +5712,34 @@
           <a:p/>
         </p:txBody>
       </p:sp>
-      <p:sp>
-        <p:nvSpPr>
-          <p:cNvPr id="4" name="TextBox 3"/>
+      <p:graphicFrame>
+        <p:nvGraphicFramePr>
+          <p:cNvPr id="4" name="Chart 3"/>
+          <p:cNvGraphicFramePr>
+            <a:graphicFrameLocks noGrp="1"/>
+          </p:cNvGraphicFramePr>
+          <p:nvPr/>
+        </p:nvGraphicFramePr>
+        <p:xfrm>
+          <a:off x="548640" y="1645920"/>
+          <a:ext cx="6675120" cy="4206240"/>
+        </p:xfrm>
+        <a:graphic>
+          <a:graphicData uri="http://schemas.openxmlformats.org/drawingml/2006/chart">
+            <c:chart xmlns:c="http://schemas.openxmlformats.org/drawingml/2006/chart" r:id="rId2"/>
+          </a:graphicData>
+        </a:graphic>
+      </p:graphicFrame>
+      <p:sp>
+        <p:nvSpPr>
+          <p:cNvPr id="5" name="TextBox 4"/>
           <p:cNvSpPr txBox="1"/>
           <p:nvPr/>
         </p:nvSpPr>
         <p:spPr>
           <a:xfrm>
-            <a:off x="548640" y="1737360"/>
-            <a:ext cx="5486400" cy="1920240"/>
+            <a:off x="7589520" y="1828800"/>
+            <a:ext cx="3931920" cy="1280160"/>
           </a:xfrm>
           <a:prstGeom prst="rect">
             <a:avLst/>
@@ -5347,75 +5758,59 @@
               </a:spcAft>
             </a:pPr>
             <a:r>
-              <a:rPr sz="1200" b="1">
-                <a:solidFill>
-                  <a:srgbClr val="6366F1"/>
-                </a:solidFill>
-                <a:latin typeface="Calibri"/>
-              </a:rPr>
-              <a:t>The classification breaks</a:t>
-            </a:r>
-          </a:p>
-          <a:p>
-            <a:pPr algn="l">
-              <a:spcAft>
-                <a:spcPts val="500"/>
+              <a:rPr sz="1100" b="0">
+                <a:solidFill>
+                  <a:srgbClr val="94A3B8"/>
+                </a:solidFill>
+                <a:latin typeface="Calibri"/>
+              </a:rPr>
+              <a:t>Fields described, not published</a:t>
+            </a:r>
+          </a:p>
+          <a:p>
+            <a:pPr algn="l">
+              <a:spcAft>
+                <a:spcPts val="200"/>
+              </a:spcAft>
+            </a:pPr>
+            <a:r>
+              <a:rPr sz="3200" b="1">
+                <a:solidFill>
+                  <a:srgbClr val="D03B3B"/>
+                </a:solidFill>
+                <a:latin typeface="Calibri"/>
+              </a:rPr>
+              <a:t>26</a:t>
+            </a:r>
+          </a:p>
+          <a:p>
+            <a:pPr algn="l">
+              <a:spcAft>
+                <a:spcPts val="0"/>
               </a:spcAft>
             </a:pPr>
             <a:r>
               <a:rPr sz="1000" b="0">
                 <a:solidFill>
-                  <a:srgbClr val="94A3B8"/>
-                </a:solidFill>
-                <a:latin typeface="Calibri"/>
-              </a:rPr>
-              <a:t>Where do the official map's classes fall?</a:t>
-            </a:r>
-          </a:p>
-          <a:p>
-            <a:pPr algn="l">
-              <a:spcAft>
-                <a:spcPts val="400"/>
-              </a:spcAft>
-            </a:pPr>
-            <a:r>
-              <a:rPr sz="1300" b="1">
-                <a:solidFill>
-                  <a:srgbClr val="0F172A"/>
-                </a:solidFill>
-                <a:latin typeface="Calibri"/>
-              </a:rPr>
-              <a:t>On a PDF plate with no text</a:t>
-            </a:r>
-          </a:p>
-          <a:p>
-            <a:pPr algn="l">
-              <a:spcAft>
-                <a:spcPts val="0"/>
-              </a:spcAft>
-            </a:pPr>
-            <a:r>
-              <a:rPr sz="950" b="0">
-                <a:solidFill>
                   <a:srgbClr val="475569"/>
                 </a:solidFill>
                 <a:latin typeface="Calibri"/>
               </a:rPr>
-              <a:t>The breaks 0.01 · 0.10 · 0.17 · 0.29 · 0.44 · 0.65 appear in no file of the corpus. They were read by rendering the image. Without them our map would be correct and incomparable with the ministry's.</a:t>
-            </a:r>
-          </a:p>
-        </p:txBody>
-      </p:sp>
-      <p:sp>
-        <p:nvSpPr>
-          <p:cNvPr id="5" name="TextBox 4"/>
+              <a:t>of 33 described by the TdE dictionary</a:t>
+            </a:r>
+          </a:p>
+        </p:txBody>
+      </p:sp>
+      <p:sp>
+        <p:nvSpPr>
+          <p:cNvPr id="6" name="TextBox 5"/>
           <p:cNvSpPr txBox="1"/>
           <p:nvPr/>
         </p:nvSpPr>
         <p:spPr>
           <a:xfrm>
-            <a:off x="548640" y="3840479"/>
-            <a:ext cx="5486400" cy="1920240"/>
+            <a:off x="7589520" y="3200400"/>
+            <a:ext cx="3931920" cy="1280160"/>
           </a:xfrm>
           <a:prstGeom prst="rect">
             <a:avLst/>
@@ -5434,75 +5829,59 @@
               </a:spcAft>
             </a:pPr>
             <a:r>
-              <a:rPr sz="1200" b="1">
-                <a:solidFill>
-                  <a:srgbClr val="6366F1"/>
-                </a:solidFill>
-                <a:latin typeface="Calibri"/>
-              </a:rPr>
-              <a:t>The index formula</a:t>
-            </a:r>
-          </a:p>
-          <a:p>
-            <a:pPr algn="l">
-              <a:spcAft>
-                <a:spcPts val="500"/>
+              <a:rPr sz="1100" b="0">
+                <a:solidFill>
+                  <a:srgbClr val="94A3B8"/>
+                </a:solidFill>
+                <a:latin typeface="Calibri"/>
+              </a:rPr>
+              <a:t>Works accepted, never handed over</a:t>
+            </a:r>
+          </a:p>
+          <a:p>
+            <a:pPr algn="l">
+              <a:spcAft>
+                <a:spcPts val="200"/>
+              </a:spcAft>
+            </a:pPr>
+            <a:r>
+              <a:rPr sz="3200" b="1">
+                <a:solidFill>
+                  <a:srgbClr val="D03B3B"/>
+                </a:solidFill>
+                <a:latin typeface="Calibri"/>
+              </a:rPr>
+              <a:t>74</a:t>
+            </a:r>
+          </a:p>
+          <a:p>
+            <a:pPr algn="l">
+              <a:spcAft>
+                <a:spcPts val="0"/>
               </a:spcAft>
             </a:pPr>
             <a:r>
               <a:rPr sz="1000" b="0">
                 <a:solidFill>
-                  <a:srgbClr val="94A3B8"/>
-                </a:solidFill>
-                <a:latin typeface="Calibri"/>
-              </a:rPr>
-              <a:t>Is the published FRI reproducible?</a:t>
-            </a:r>
-          </a:p>
-          <a:p>
-            <a:pPr algn="l">
-              <a:spcAft>
-                <a:spcPts val="400"/>
-              </a:spcAft>
-            </a:pPr>
-            <a:r>
-              <a:rPr sz="1300" b="1">
-                <a:solidFill>
-                  <a:srgbClr val="0F172A"/>
-                </a:solidFill>
-                <a:latin typeface="Calibri"/>
-              </a:rPr>
-              <a:t>Yes, where it is defined</a:t>
-            </a:r>
-          </a:p>
-          <a:p>
-            <a:pPr algn="l">
-              <a:spcAft>
-                <a:spcPts val="0"/>
-              </a:spcAft>
-            </a:pPr>
-            <a:r>
-              <a:rPr sz="950" b="0">
-                <a:solidFill>
                   <a:srgbClr val="475569"/>
                 </a:solidFill>
                 <a:latin typeface="Calibri"/>
               </a:rPr>
-              <a:t>The announced geometric mean reproduces the index on cantons whose seven components are non-zero. On the others, a zero cancels the product — yet the index is published there. The handling of zeros is written nowhere.</a:t>
-            </a:r>
-          </a:p>
-        </p:txBody>
-      </p:sp>
-      <p:sp>
-        <p:nvSpPr>
-          <p:cNvPr id="6" name="TextBox 5"/>
+              <a:t>median handover delay: 398 days</a:t>
+            </a:r>
+          </a:p>
+        </p:txBody>
+      </p:sp>
+      <p:sp>
+        <p:nvSpPr>
+          <p:cNvPr id="7" name="TextBox 6"/>
           <p:cNvSpPr txBox="1"/>
           <p:nvPr/>
         </p:nvSpPr>
         <p:spPr>
           <a:xfrm>
-            <a:off x="6492240" y="1828800"/>
-            <a:ext cx="5029200" cy="1371600"/>
+            <a:off x="7589520" y="4572000"/>
+            <a:ext cx="3931920" cy="1371600"/>
           </a:xfrm>
           <a:prstGeom prst="rect">
             <a:avLst/>
@@ -5521,29 +5900,45 @@
               </a:spcAft>
             </a:pPr>
             <a:r>
-              <a:rPr sz="1100" b="0">
+              <a:rPr sz="1200" b="1">
+                <a:solidFill>
+                  <a:srgbClr val="6366F1"/>
+                </a:solidFill>
+                <a:latin typeface="Calibri"/>
+              </a:rPr>
+              <a:t>The functionality rate</a:t>
+            </a:r>
+          </a:p>
+          <a:p>
+            <a:pPr algn="l">
+              <a:spcAft>
+                <a:spcPts val="500"/>
+              </a:spcAft>
+            </a:pPr>
+            <a:r>
+              <a:rPr sz="1000" b="0">
                 <a:solidFill>
                   <a:srgbClr val="94A3B8"/>
                 </a:solidFill>
                 <a:latin typeface="Calibri"/>
               </a:rPr>
-              <a:t>Cantons where the formula holds</a:t>
-            </a:r>
-          </a:p>
-          <a:p>
-            <a:pPr algn="l">
-              <a:spcAft>
-                <a:spcPts val="200"/>
-              </a:spcAft>
-            </a:pPr>
-            <a:r>
-              <a:rPr sz="3200" b="1">
-                <a:solidFill>
-                  <a:srgbClr val="6366F1"/>
-                </a:solidFill>
-                <a:latin typeface="Calibri"/>
-              </a:rPr>
-              <a:t>42 / 388</a:t>
+              <a:t>Can it be computed?</a:t>
+            </a:r>
+          </a:p>
+          <a:p>
+            <a:pPr algn="l">
+              <a:spcAft>
+                <a:spcPts val="400"/>
+              </a:spcAft>
+            </a:pPr>
+            <a:r>
+              <a:rPr sz="1300" b="1">
+                <a:solidFill>
+                  <a:srgbClr val="0F172A"/>
+                </a:solidFill>
+                <a:latin typeface="Calibri"/>
+              </a:rPr>
+              <a:t>No — no field carries it</a:t>
             </a:r>
           </a:p>
           <a:p>
@@ -5553,84 +5948,13 @@
               </a:spcAft>
             </a:pPr>
             <a:r>
-              <a:rPr sz="1000" b="0">
+              <a:rPr sz="950" b="0">
                 <a:solidFill>
                   <a:srgbClr val="475569"/>
                 </a:solidFill>
                 <a:latin typeface="Calibri"/>
               </a:rPr>
-              <a:t>the others carry at least one zero</a:t>
-            </a:r>
-          </a:p>
-        </p:txBody>
-      </p:sp>
-      <p:sp>
-        <p:nvSpPr>
-          <p:cNvPr id="7" name="TextBox 6"/>
-          <p:cNvSpPr txBox="1"/>
-          <p:nvPr/>
-        </p:nvSpPr>
-        <p:spPr>
-          <a:xfrm>
-            <a:off x="6492240" y="3383280"/>
-            <a:ext cx="5029200" cy="1371600"/>
-          </a:xfrm>
-          <a:prstGeom prst="rect">
-            <a:avLst/>
-          </a:prstGeom>
-          <a:noFill/>
-        </p:spPr>
-        <p:txBody>
-          <a:bodyPr wrap="square">
-            <a:spAutoFit/>
-          </a:bodyPr>
-          <a:lstStyle/>
-          <a:p>
-            <a:pPr algn="l">
-              <a:spcAft>
-                <a:spcPts val="200"/>
-              </a:spcAft>
-            </a:pPr>
-            <a:r>
-              <a:rPr sz="1100" b="0">
-                <a:solidFill>
-                  <a:srgbClr val="94A3B8"/>
-                </a:solidFill>
-                <a:latin typeface="Calibri"/>
-              </a:rPr>
-              <a:t>Fields described, not released</a:t>
-            </a:r>
-          </a:p>
-          <a:p>
-            <a:pPr algn="l">
-              <a:spcAft>
-                <a:spcPts val="200"/>
-              </a:spcAft>
-            </a:pPr>
-            <a:r>
-              <a:rPr sz="3200" b="1">
-                <a:solidFill>
-                  <a:srgbClr val="D03B3B"/>
-                </a:solidFill>
-                <a:latin typeface="Calibri"/>
-              </a:rPr>
-              <a:t>26</a:t>
-            </a:r>
-          </a:p>
-          <a:p>
-            <a:pPr algn="l">
-              <a:spcAft>
-                <a:spcPts val="0"/>
-              </a:spcAft>
-            </a:pPr>
-            <a:r>
-              <a:rPr sz="1000" b="0">
-                <a:solidFill>
-                  <a:srgbClr val="475569"/>
-                </a:solidFill>
-                <a:latin typeface="Calibri"/>
-              </a:rPr>
-              <a:t>of 33 the dictionary describes</a:t>
+              <a:t>The brief asks for breakdown rates by region; the corpus cannot deliver them: no status, no failure date, no abandonment. A maintenance plan and a handover are upkeep signals, not service measures — a facility with a plan may well be down, and nothing here would say so.</a:t>
             </a:r>
           </a:p>
         </p:txBody>
@@ -6033,7 +6357,7 @@
                 </a:solidFill>
                 <a:latin typeface="Calibri"/>
               </a:rPr>
-              <a:t>6 · Is the risk covered by facilities?</a:t>
+              <a:t>6 · Risk is concentrated; equipment is not</a:t>
             </a:r>
           </a:p>
           <a:p>
@@ -6049,7 +6373,7 @@
                 </a:solidFill>
                 <a:latin typeface="Calibri"/>
               </a:rPr>
-              <a:t>Share of equipped cantons, by risk class</a:t>
+              <a:t>Population by official risk class, and what explains where facilities are built</a:t>
             </a:r>
           </a:p>
         </p:txBody>
@@ -6109,8 +6433,8 @@
         </p:nvSpPr>
         <p:spPr>
           <a:xfrm>
-            <a:off x="7589520" y="1828800"/>
-            <a:ext cx="3931920" cy="2011680"/>
+            <a:off x="7589520" y="1737360"/>
+            <a:ext cx="3931920" cy="1188720"/>
           </a:xfrm>
           <a:prstGeom prst="rect">
             <a:avLst/>
@@ -6129,61 +6453,45 @@
               </a:spcAft>
             </a:pPr>
             <a:r>
-              <a:rPr sz="1200" b="1">
-                <a:solidFill>
-                  <a:srgbClr val="6366F1"/>
-                </a:solidFill>
-                <a:latin typeface="Calibri"/>
-              </a:rPr>
-              <a:t>What explains the allocation</a:t>
-            </a:r>
-          </a:p>
-          <a:p>
-            <a:pPr algn="l">
-              <a:spcAft>
-                <a:spcPts val="500"/>
+              <a:rPr sz="1100" b="0">
+                <a:solidFill>
+                  <a:srgbClr val="94A3B8"/>
+                </a:solidFill>
+                <a:latin typeface="Calibri"/>
+              </a:rPr>
+              <a:t>High-risk cantons</a:t>
+            </a:r>
+          </a:p>
+          <a:p>
+            <a:pPr algn="l">
+              <a:spcAft>
+                <a:spcPts val="200"/>
+              </a:spcAft>
+            </a:pPr>
+            <a:r>
+              <a:rPr sz="3200" b="1">
+                <a:solidFill>
+                  <a:srgbClr val="D03B3B"/>
+                </a:solidFill>
+                <a:latin typeface="Calibri"/>
+              </a:rPr>
+              <a:t>17</a:t>
+            </a:r>
+          </a:p>
+          <a:p>
+            <a:pPr algn="l">
+              <a:spcAft>
+                <a:spcPts val="0"/>
               </a:spcAft>
             </a:pPr>
             <a:r>
               <a:rPr sz="1000" b="0">
                 <a:solidFill>
-                  <a:srgbClr val="94A3B8"/>
-                </a:solidFill>
-                <a:latin typeface="Calibri"/>
-              </a:rPr>
-              <a:t>Need, or the programme perimeter?</a:t>
-            </a:r>
-          </a:p>
-          <a:p>
-            <a:pPr algn="l">
-              <a:spcAft>
-                <a:spcPts val="400"/>
-              </a:spcAft>
-            </a:pPr>
-            <a:r>
-              <a:rPr sz="1300" b="1">
-                <a:solidFill>
-                  <a:srgbClr val="0F172A"/>
-                </a:solidFill>
-                <a:latin typeface="Calibri"/>
-              </a:rPr>
-              <a:t>7 % explained by need, 27 % with region</a:t>
-            </a:r>
-          </a:p>
-          <a:p>
-            <a:pPr algn="l">
-              <a:spcAft>
-                <a:spcPts val="0"/>
-              </a:spcAft>
-            </a:pPr>
-            <a:r>
-              <a:rPr sz="950" b="0">
-                <a:solidFill>
                   <a:srgbClr val="475569"/>
                 </a:solidFill>
                 <a:latin typeface="Calibri"/>
               </a:rPr>
-              <a:t>Population, risk and wealth explain little. Adding region quadruples explanatory power without risk becoming significant: allocation follows programme boundaries, not the exposure they invoke.</a:t>
+              <a:t>4% of the grid, 2.9 M inhabitants</a:t>
             </a:r>
           </a:p>
         </p:txBody>
@@ -6196,8 +6504,8 @@
         </p:nvSpPr>
         <p:spPr>
           <a:xfrm>
-            <a:off x="7589520" y="4114800"/>
-            <a:ext cx="3931920" cy="1463040"/>
+            <a:off x="7589520" y="3063240"/>
+            <a:ext cx="3931920" cy="1371600"/>
           </a:xfrm>
           <a:prstGeom prst="rect">
             <a:avLst/>
@@ -6216,15 +6524,86 @@
               </a:spcAft>
             </a:pPr>
             <a:r>
-              <a:rPr sz="1100" b="0">
+              <a:rPr sz="1200" b="1">
+                <a:solidFill>
+                  <a:srgbClr val="6366F1"/>
+                </a:solidFill>
+                <a:latin typeface="Calibri"/>
+              </a:rPr>
+              <a:t>What explains the allocation</a:t>
+            </a:r>
+          </a:p>
+          <a:p>
+            <a:pPr algn="l">
+              <a:spcAft>
+                <a:spcPts val="500"/>
+              </a:spcAft>
+            </a:pPr>
+            <a:r>
+              <a:rPr sz="1000" b="0">
                 <a:solidFill>
                   <a:srgbClr val="94A3B8"/>
                 </a:solidFill>
                 <a:latin typeface="Calibri"/>
               </a:rPr>
-              <a:t>Priority cantons</a:t>
-            </a:r>
-          </a:p>
+              <a:t>Need, or the programme's footprint?</a:t>
+            </a:r>
+          </a:p>
+          <a:p>
+            <a:pPr algn="l">
+              <a:spcAft>
+                <a:spcPts val="400"/>
+              </a:spcAft>
+            </a:pPr>
+            <a:r>
+              <a:rPr sz="1300" b="1">
+                <a:solidFill>
+                  <a:srgbClr val="0F172A"/>
+                </a:solidFill>
+                <a:latin typeface="Calibri"/>
+              </a:rPr>
+              <a:t>7% from need, 27% adding the region</a:t>
+            </a:r>
+          </a:p>
+          <a:p>
+            <a:pPr algn="l">
+              <a:spcAft>
+                <a:spcPts val="0"/>
+              </a:spcAft>
+            </a:pPr>
+            <a:r>
+              <a:rPr sz="950" b="0">
+                <a:solidFill>
+                  <a:srgbClr val="475569"/>
+                </a:solidFill>
+                <a:latin typeface="Calibri"/>
+              </a:rPr>
+              <a:t>Population, risk and wealth explain little; adding the region quadruples the explanatory power. 12 exposed cantons — 1.7 M inhabitants — have no recorded facility.</a:t>
+            </a:r>
+          </a:p>
+        </p:txBody>
+      </p:sp>
+      <p:sp>
+        <p:nvSpPr>
+          <p:cNvPr id="7" name="TextBox 6"/>
+          <p:cNvSpPr txBox="1"/>
+          <p:nvPr/>
+        </p:nvSpPr>
+        <p:spPr>
+          <a:xfrm>
+            <a:off x="7589520" y="4572000"/>
+            <a:ext cx="3931920" cy="1371600"/>
+          </a:xfrm>
+          <a:prstGeom prst="rect">
+            <a:avLst/>
+          </a:prstGeom>
+          <a:noFill/>
+        </p:spPr>
+        <p:txBody>
+          <a:bodyPr wrap="square">
+            <a:spAutoFit/>
+          </a:bodyPr>
+          <a:lstStyle/>
           <a:p>
             <a:pPr algn="l">
               <a:spcAft>
@@ -6232,13 +6611,45 @@
               </a:spcAft>
             </a:pPr>
             <a:r>
-              <a:rPr sz="3200" b="1">
-                <a:solidFill>
-                  <a:srgbClr val="D03B3B"/>
-                </a:solidFill>
-                <a:latin typeface="Calibri"/>
-              </a:rPr>
-              <a:t>12</a:t>
+              <a:rPr sz="1200" b="1">
+                <a:solidFill>
+                  <a:srgbClr val="6366F1"/>
+                </a:solidFill>
+                <a:latin typeface="Calibri"/>
+              </a:rPr>
+              <a:t>The expected objection</a:t>
+            </a:r>
+          </a:p>
+          <a:p>
+            <a:pPr algn="l">
+              <a:spcAft>
+                <a:spcPts val="500"/>
+              </a:spcAft>
+            </a:pPr>
+            <a:r>
+              <a:rPr sz="1000" b="0">
+                <a:solidFill>
+                  <a:srgbClr val="94A3B8"/>
+                </a:solidFill>
+                <a:latin typeface="Calibri"/>
+              </a:rPr>
+              <a:t>Does the index just rank populous cantons?</a:t>
+            </a:r>
+          </a:p>
+          <a:p>
+            <a:pPr algn="l">
+              <a:spcAft>
+                <a:spcPts val="400"/>
+              </a:spcAft>
+            </a:pPr>
+            <a:r>
+              <a:rPr sz="1300" b="1">
+                <a:solidFill>
+                  <a:srgbClr val="0F172A"/>
+                </a:solidFill>
+                <a:latin typeface="Calibri"/>
+              </a:rPr>
+              <a:t>No — ρ = 0.94 without population</a:t>
             </a:r>
           </a:p>
           <a:p>
@@ -6248,20 +6659,20 @@
               </a:spcAft>
             </a:pPr>
             <a:r>
-              <a:rPr sz="1000" b="0">
+              <a:rPr sz="950" b="0">
                 <a:solidFill>
                   <a:srgbClr val="475569"/>
                 </a:solidFill>
                 <a:latin typeface="Calibri"/>
               </a:rPr>
-              <a:t>exposed and unequipped — 1.7 M inhabitants</a:t>
-            </a:r>
-          </a:p>
-        </p:txBody>
-      </p:sp>
-      <p:sp>
-        <p:nvSpPr>
-          <p:cNvPr id="7" name="TextBox 6"/>
+              <a:t>Dropping the demographic component and recomputing the index moves cantons by 3 places at the median, across the 42 where the official formula reproduces. The ranking holds without population: it does not rank people, it ranks ground.</a:t>
+            </a:r>
+          </a:p>
+        </p:txBody>
+      </p:sp>
+      <p:sp>
+        <p:nvSpPr>
+          <p:cNvPr id="8" name="TextBox 7"/>
           <p:cNvSpPr txBox="1"/>
           <p:nvPr/>
         </p:nvSpPr>
@@ -6421,8 +6832,8 @@
         </p:nvSpPr>
         <p:spPr>
           <a:xfrm>
-            <a:off x="7589520" y="1828800"/>
-            <a:ext cx="3931920" cy="1280160"/>
+            <a:off x="7589520" y="1737360"/>
+            <a:ext cx="3931920" cy="1188720"/>
           </a:xfrm>
           <a:prstGeom prst="rect">
             <a:avLst/>
@@ -6492,8 +6903,8 @@
         </p:nvSpPr>
         <p:spPr>
           <a:xfrm>
-            <a:off x="7589520" y="3291840"/>
-            <a:ext cx="3931920" cy="2560320"/>
+            <a:off x="7589520" y="3063240"/>
+            <a:ext cx="3931920" cy="1188720"/>
           </a:xfrm>
           <a:prstGeom prst="rect">
             <a:avLst/>
@@ -6512,6 +6923,77 @@
               </a:spcAft>
             </a:pPr>
             <a:r>
+              <a:rPr sz="1100" b="0">
+                <a:solidFill>
+                  <a:srgbClr val="94A3B8"/>
+                </a:solidFill>
+                <a:latin typeface="Calibri"/>
+              </a:rPr>
+              <a:t>Elasticity to population</a:t>
+            </a:r>
+          </a:p>
+          <a:p>
+            <a:pPr algn="l">
+              <a:spcAft>
+                <a:spcPts val="200"/>
+              </a:spcAft>
+            </a:pPr>
+            <a:r>
+              <a:rPr sz="3200" b="1">
+                <a:solidFill>
+                  <a:srgbClr val="D03B3B"/>
+                </a:solidFill>
+                <a:latin typeface="Calibri"/>
+              </a:rPr>
+              <a:t>0.55</a:t>
+            </a:r>
+          </a:p>
+          <a:p>
+            <a:pPr algn="l">
+              <a:spcAft>
+                <a:spcPts val="0"/>
+              </a:spcAft>
+            </a:pPr>
+            <a:r>
+              <a:rPr sz="1000" b="0">
+                <a:solidFill>
+                  <a:srgbClr val="475569"/>
+                </a:solidFill>
+                <a:latin typeface="Calibri"/>
+              </a:rPr>
+              <a:t>over 35 equipped cantons · Gini of 0.39</a:t>
+            </a:r>
+          </a:p>
+        </p:txBody>
+      </p:sp>
+      <p:sp>
+        <p:nvSpPr>
+          <p:cNvPr id="7" name="TextBox 6"/>
+          <p:cNvSpPr txBox="1"/>
+          <p:nvPr/>
+        </p:nvSpPr>
+        <p:spPr>
+          <a:xfrm>
+            <a:off x="7589520" y="4389120"/>
+            <a:ext cx="3931920" cy="1554480"/>
+          </a:xfrm>
+          <a:prstGeom prst="rect">
+            <a:avLst/>
+          </a:prstGeom>
+          <a:noFill/>
+        </p:spPr>
+        <p:txBody>
+          <a:bodyPr wrap="square">
+            <a:spAutoFit/>
+          </a:bodyPr>
+          <a:lstStyle/>
+          <a:p>
+            <a:pPr algn="l">
+              <a:spcAft>
+                <a:spcPts val="200"/>
+              </a:spcAft>
+            </a:pPr>
+            <a:r>
               <a:rPr sz="1200" b="1">
                 <a:solidFill>
                   <a:srgbClr val="6366F1"/>
@@ -6566,14 +7048,14 @@
                 </a:solidFill>
                 <a:latin typeface="Calibri"/>
               </a:rPr>
-              <a:t>The elasticity of cost to beneficiaries is statistically nil: cost per head depends only on the site chosen. That is either a constraint endured, or a lever pulled.</a:t>
-            </a:r>
-          </a:p>
-        </p:txBody>
-      </p:sp>
-      <p:sp>
-        <p:nvSpPr>
-          <p:cNvPr id="7" name="TextBox 6"/>
+              <a:t>The elasticity of cost to beneficiaries is statistically nil: cost per inhabitant is therefore decided by choosing WHERE to build, not by negotiating price. Competitive tendering also came in 17% below the initial estimate, for 3.5 bn FCFA disbursed — headroom already freed.</a:t>
+            </a:r>
+          </a:p>
+        </p:txBody>
+      </p:sp>
+      <p:sp>
+        <p:nvSpPr>
+          <p:cNvPr id="8" name="TextBox 7"/>
           <p:cNvSpPr txBox="1"/>
           <p:nvPr/>
         </p:nvSpPr>
@@ -6657,7 +7139,7 @@
                 </a:solidFill>
                 <a:latin typeface="Calibri"/>
               </a:rPr>
-              <a:t>8 · Does the money follow the people?</a:t>
+              <a:t>8 · How many facilities are missing, and at what price</a:t>
             </a:r>
           </a:p>
           <a:p>
@@ -6673,7 +7155,7 @@
                 </a:solidFill>
                 <a:latin typeface="Calibri"/>
               </a:rPr>
-              <a:t>What the observed allocation says about itself</a:t>
+              <a:t>Three service thresholds, three programmes — the threshold is a policy choice, not a finding</a:t>
             </a:r>
           </a:p>
         </p:txBody>
@@ -6707,16 +7189,34 @@
           <a:p/>
         </p:txBody>
       </p:sp>
-      <p:sp>
-        <p:nvSpPr>
-          <p:cNvPr id="4" name="TextBox 3"/>
+      <p:graphicFrame>
+        <p:nvGraphicFramePr>
+          <p:cNvPr id="4" name="Chart 3"/>
+          <p:cNvGraphicFramePr>
+            <a:graphicFrameLocks noGrp="1"/>
+          </p:cNvGraphicFramePr>
+          <p:nvPr/>
+        </p:nvGraphicFramePr>
+        <p:xfrm>
+          <a:off x="548640" y="1645920"/>
+          <a:ext cx="6675120" cy="4206240"/>
+        </p:xfrm>
+        <a:graphic>
+          <a:graphicData uri="http://schemas.openxmlformats.org/drawingml/2006/chart">
+            <c:chart xmlns:c="http://schemas.openxmlformats.org/drawingml/2006/chart" r:id="rId2"/>
+          </a:graphicData>
+        </a:graphic>
+      </p:graphicFrame>
+      <p:sp>
+        <p:nvSpPr>
+          <p:cNvPr id="5" name="TextBox 4"/>
           <p:cNvSpPr txBox="1"/>
           <p:nvPr/>
         </p:nvSpPr>
         <p:spPr>
           <a:xfrm>
-            <a:off x="548640" y="1737360"/>
-            <a:ext cx="3566160" cy="1371600"/>
+            <a:off x="7589520" y="1737360"/>
+            <a:ext cx="3931920" cy="1188720"/>
           </a:xfrm>
           <a:prstGeom prst="rect">
             <a:avLst/>
@@ -6741,7 +7241,7 @@
                 </a:solidFill>
                 <a:latin typeface="Calibri"/>
               </a:rPr>
-              <a:t>Elasticity to population</a:t>
+              <a:t>Facilities to level the regions</a:t>
             </a:r>
           </a:p>
           <a:p>
@@ -6753,11 +7253,11 @@
             <a:r>
               <a:rPr sz="3200" b="1">
                 <a:solidFill>
-                  <a:srgbClr val="D03B3B"/>
-                </a:solidFill>
-                <a:latin typeface="Calibri"/>
-              </a:rPr>
-              <a:t>0.55</a:t>
+                  <a:srgbClr val="6366F1"/>
+                </a:solidFill>
+                <a:latin typeface="Calibri"/>
+              </a:rPr>
+              <a:t>34</a:t>
             </a:r>
           </a:p>
           <a:p>
@@ -6773,21 +7273,21 @@
                 </a:solidFill>
                 <a:latin typeface="Calibri"/>
               </a:rPr>
-              <a:t>estimated on 35 funded cantons</a:t>
-            </a:r>
-          </a:p>
-        </p:txBody>
-      </p:sp>
-      <p:sp>
-        <p:nvSpPr>
-          <p:cNvPr id="5" name="TextBox 4"/>
+              <a:t>onto the national median — 567.9 M FCFA</a:t>
+            </a:r>
+          </a:p>
+        </p:txBody>
+      </p:sp>
+      <p:sp>
+        <p:nvSpPr>
+          <p:cNvPr id="6" name="TextBox 5"/>
           <p:cNvSpPr txBox="1"/>
           <p:nvPr/>
         </p:nvSpPr>
         <p:spPr>
           <a:xfrm>
-            <a:off x="4297680" y="1737360"/>
-            <a:ext cx="3566160" cy="1371600"/>
+            <a:off x="7589520" y="3063240"/>
+            <a:ext cx="3931920" cy="1188720"/>
           </a:xfrm>
           <a:prstGeom prst="rect">
             <a:avLst/>
@@ -6812,7 +7312,7 @@
                 </a:solidFill>
                 <a:latin typeface="Calibri"/>
               </a:rPr>
-              <a:t>Gini per inhabitant</a:t>
+              <a:t>Scenario: 1 per 1,000 people</a:t>
             </a:r>
           </a:p>
           <a:p>
@@ -6824,11 +7324,11 @@
             <a:r>
               <a:rPr sz="3200" b="1">
                 <a:solidFill>
-                  <a:srgbClr val="6366F1"/>
-                </a:solidFill>
-                <a:latin typeface="Calibri"/>
-              </a:rPr>
-              <a:t>0.39</a:t>
+                  <a:srgbClr val="D03B3B"/>
+                </a:solidFill>
+                <a:latin typeface="Calibri"/>
+              </a:rPr>
+              <a:t>131.7 bn</a:t>
             </a:r>
           </a:p>
           <a:p>
@@ -6844,21 +7344,21 @@
                 </a:solidFill>
                 <a:latin typeface="Calibri"/>
               </a:rPr>
-              <a:t>interdecile ratio of 6.3</a:t>
-            </a:r>
-          </a:p>
-        </p:txBody>
-      </p:sp>
-      <p:sp>
-        <p:nvSpPr>
-          <p:cNvPr id="6" name="TextBox 5"/>
+              <a:t>7,886 facilities to build</a:t>
+            </a:r>
+          </a:p>
+        </p:txBody>
+      </p:sp>
+      <p:sp>
+        <p:nvSpPr>
+          <p:cNvPr id="7" name="TextBox 6"/>
           <p:cNvSpPr txBox="1"/>
           <p:nvPr/>
         </p:nvSpPr>
         <p:spPr>
           <a:xfrm>
-            <a:off x="8046720" y="1737360"/>
-            <a:ext cx="3474720" cy="1371600"/>
+            <a:off x="7589520" y="4389120"/>
+            <a:ext cx="3931920" cy="1554480"/>
           </a:xfrm>
           <a:prstGeom prst="rect">
             <a:avLst/>
@@ -6877,29 +7377,45 @@
               </a:spcAft>
             </a:pPr>
             <a:r>
-              <a:rPr sz="1100" b="0">
+              <a:rPr sz="1200" b="1">
+                <a:solidFill>
+                  <a:srgbClr val="6366F1"/>
+                </a:solidFill>
+                <a:latin typeface="Calibri"/>
+              </a:rPr>
+              <a:t>The unit price</a:t>
+            </a:r>
+          </a:p>
+          <a:p>
+            <a:pPr algn="l">
+              <a:spcAft>
+                <a:spcPts val="500"/>
+              </a:spcAft>
+            </a:pPr>
+            <a:r>
+              <a:rPr sz="1000" b="0">
                 <a:solidFill>
                   <a:srgbClr val="94A3B8"/>
                 </a:solidFill>
                 <a:latin typeface="Calibri"/>
               </a:rPr>
-              <a:t>Amount disbursed</a:t>
-            </a:r>
-          </a:p>
-          <a:p>
-            <a:pPr algn="l">
-              <a:spcAft>
-                <a:spcPts val="200"/>
-              </a:spcAft>
-            </a:pPr>
-            <a:r>
-              <a:rPr sz="3200" b="1">
-                <a:solidFill>
-                  <a:srgbClr val="6366F1"/>
-                </a:solidFill>
-                <a:latin typeface="Calibri"/>
-              </a:rPr>
-              <a:t>3.5 Md</a:t>
+              <a:t>Where does it come from?</a:t>
+            </a:r>
+          </a:p>
+          <a:p>
+            <a:pPr algn="l">
+              <a:spcAft>
+                <a:spcPts val="400"/>
+              </a:spcAft>
+            </a:pPr>
+            <a:r>
+              <a:rPr sz="1300" b="1">
+                <a:solidFill>
+                  <a:srgbClr val="0F172A"/>
+                </a:solidFill>
+                <a:latin typeface="Calibri"/>
+              </a:rPr>
+              <a:t>16.7 M FCFA, observed median</a:t>
             </a:r>
           </a:p>
           <a:p>
@@ -6909,100 +7425,13 @@
               </a:spcAft>
             </a:pPr>
             <a:r>
-              <a:rPr sz="1000" b="0">
+              <a:rPr sz="950" b="0">
                 <a:solidFill>
                   <a:srgbClr val="475569"/>
                 </a:solidFill>
                 <a:latin typeface="Calibri"/>
               </a:rPr>
-              <a:t>17 % below the initial estimate</a:t>
-            </a:r>
-          </a:p>
-        </p:txBody>
-      </p:sp>
-      <p:sp>
-        <p:nvSpPr>
-          <p:cNvPr id="7" name="TextBox 6"/>
-          <p:cNvSpPr txBox="1"/>
-          <p:nvPr/>
-        </p:nvSpPr>
-        <p:spPr>
-          <a:xfrm>
-            <a:off x="548640" y="3383280"/>
-            <a:ext cx="5486400" cy="2286000"/>
-          </a:xfrm>
-          <a:prstGeom prst="rect">
-            <a:avLst/>
-          </a:prstGeom>
-          <a:noFill/>
-        </p:spPr>
-        <p:txBody>
-          <a:bodyPr wrap="square">
-            <a:spAutoFit/>
-          </a:bodyPr>
-          <a:lstStyle/>
-          <a:p>
-            <a:pPr algn="l">
-              <a:spcAft>
-                <a:spcPts val="200"/>
-              </a:spcAft>
-            </a:pPr>
-            <a:r>
-              <a:rPr sz="1200" b="1">
-                <a:solidFill>
-                  <a:srgbClr val="6366F1"/>
-                </a:solidFill>
-                <a:latin typeface="Calibri"/>
-              </a:rPr>
-              <a:t>A regressive allocation</a:t>
-            </a:r>
-          </a:p>
-          <a:p>
-            <a:pPr algn="l">
-              <a:spcAft>
-                <a:spcPts val="500"/>
-              </a:spcAft>
-            </a:pPr>
-            <a:r>
-              <a:rPr sz="1000" b="0">
-                <a:solidFill>
-                  <a:srgbClr val="94A3B8"/>
-                </a:solidFill>
-                <a:latin typeface="Calibri"/>
-              </a:rPr>
-              <a:t>Does a canton twice as populated get twice as much?</a:t>
-            </a:r>
-          </a:p>
-          <a:p>
-            <a:pPr algn="l">
-              <a:spcAft>
-                <a:spcPts val="400"/>
-              </a:spcAft>
-            </a:pPr>
-            <a:r>
-              <a:rPr sz="1300" b="1">
-                <a:solidFill>
-                  <a:srgbClr val="0F172A"/>
-                </a:solidFill>
-                <a:latin typeface="Calibri"/>
-              </a:rPr>
-              <a:t>No: 46 % more, not double</a:t>
-            </a:r>
-          </a:p>
-          <a:p>
-            <a:pPr algn="l">
-              <a:spcAft>
-                <a:spcPts val="0"/>
-              </a:spcAft>
-            </a:pPr>
-            <a:r>
-              <a:rPr sz="950" b="0">
-                <a:solidFill>
-                  <a:srgbClr val="475569"/>
-                </a:solidFill>
-                <a:latin typeface="Calibri"/>
-              </a:rPr>
-              <a:t>Combined with the flat cost on the previous page, this gap costs beneficiaries without saving a franc. The demographic key is not a recommendation — it is the most neutral yardstick available.</a:t>
+              <a:t>Median of amounts actually paid on 215 COSO facilities, not a price list. It therefore carries that programme's conditions — northern labour, borehole depth, contract year — and does not transpose as-is to another region.</a:t>
             </a:r>
           </a:p>
         </p:txBody>
@@ -7010,93 +7439,6 @@
       <p:sp>
         <p:nvSpPr>
           <p:cNvPr id="8" name="TextBox 7"/>
-          <p:cNvSpPr txBox="1"/>
-          <p:nvPr/>
-        </p:nvSpPr>
-        <p:spPr>
-          <a:xfrm>
-            <a:off x="6309359" y="3383280"/>
-            <a:ext cx="5486400" cy="2286000"/>
-          </a:xfrm>
-          <a:prstGeom prst="rect">
-            <a:avLst/>
-          </a:prstGeom>
-          <a:noFill/>
-        </p:spPr>
-        <p:txBody>
-          <a:bodyPr wrap="square">
-            <a:spAutoFit/>
-          </a:bodyPr>
-          <a:lstStyle/>
-          <a:p>
-            <a:pPr algn="l">
-              <a:spcAft>
-                <a:spcPts val="200"/>
-              </a:spcAft>
-            </a:pPr>
-            <a:r>
-              <a:rPr sz="1200" b="1">
-                <a:solidFill>
-                  <a:srgbClr val="6366F1"/>
-                </a:solidFill>
-                <a:latin typeface="Calibri"/>
-              </a:rPr>
-              <a:t>A margin already released</a:t>
-            </a:r>
-          </a:p>
-          <a:p>
-            <a:pPr algn="l">
-              <a:spcAft>
-                <a:spcPts val="500"/>
-              </a:spcAft>
-            </a:pPr>
-            <a:r>
-              <a:rPr sz="1000" b="0">
-                <a:solidFill>
-                  <a:srgbClr val="94A3B8"/>
-                </a:solidFill>
-                <a:latin typeface="Calibri"/>
-              </a:rPr>
-              <a:t>What does the estimate-to-contract gap say?</a:t>
-            </a:r>
-          </a:p>
-          <a:p>
-            <a:pPr algn="l">
-              <a:spcAft>
-                <a:spcPts val="400"/>
-              </a:spcAft>
-            </a:pPr>
-            <a:r>
-              <a:rPr sz="1300" b="1">
-                <a:solidFill>
-                  <a:srgbClr val="0F172A"/>
-                </a:solidFill>
-                <a:latin typeface="Calibri"/>
-              </a:rPr>
-              <a:t>Competitive tendering held</a:t>
-            </a:r>
-          </a:p>
-          <a:p>
-            <a:pPr algn="l">
-              <a:spcAft>
-                <a:spcPts val="0"/>
-              </a:spcAft>
-            </a:pPr>
-            <a:r>
-              <a:rPr sz="950" b="0">
-                <a:solidFill>
-                  <a:srgbClr val="475569"/>
-                </a:solidFill>
-                <a:latin typeface="Calibri"/>
-              </a:rPr>
-              <a:t>The estimate stood at 4.2 billion, signed contracts at 3.5. That gap is a margin released at tender, not a delivery saving: the amount paid tracks the contracts.</a:t>
-            </a:r>
-          </a:p>
-        </p:txBody>
-      </p:sp>
-      <p:sp>
-        <p:nvSpPr>
-          <p:cNvPr id="9" name="TextBox 8"/>
           <p:cNvSpPr txBox="1"/>
           <p:nvPr/>
         </p:nvSpPr>
@@ -7180,7 +7522,7 @@
                 </a:solidFill>
                 <a:latin typeface="Calibri"/>
               </a:rPr>
-              <a:t>9 · Three levers, in increasing cost</a:t>
+              <a:t>9 · Two dated programmes, canton by canton</a:t>
             </a:r>
           </a:p>
           <a:p>
@@ -7196,7 +7538,7 @@
                 </a:solidFill>
                 <a:latin typeface="Calibri"/>
               </a:rPr>
-              <a:t>Each follows from a figure in this report, none from an opinion</a:t>
+              <a:t>What the dashboard puts on the map: a site, a year, an amount</a:t>
             </a:r>
           </a:p>
         </p:txBody>
@@ -7230,16 +7572,34 @@
           <a:p/>
         </p:txBody>
       </p:sp>
-      <p:sp>
-        <p:nvSpPr>
-          <p:cNvPr id="4" name="TextBox 3"/>
+      <p:graphicFrame>
+        <p:nvGraphicFramePr>
+          <p:cNvPr id="4" name="Chart 3"/>
+          <p:cNvGraphicFramePr>
+            <a:graphicFrameLocks noGrp="1"/>
+          </p:cNvGraphicFramePr>
+          <p:nvPr/>
+        </p:nvGraphicFramePr>
+        <p:xfrm>
+          <a:off x="548640" y="1645920"/>
+          <a:ext cx="6675120" cy="4206240"/>
+        </p:xfrm>
+        <a:graphic>
+          <a:graphicData uri="http://schemas.openxmlformats.org/drawingml/2006/chart">
+            <c:chart xmlns:c="http://schemas.openxmlformats.org/drawingml/2006/chart" r:id="rId2"/>
+          </a:graphicData>
+        </a:graphic>
+      </p:graphicFrame>
+      <p:sp>
+        <p:nvSpPr>
+          <p:cNvPr id="5" name="TextBox 4"/>
           <p:cNvSpPr txBox="1"/>
           <p:nvPr/>
         </p:nvSpPr>
         <p:spPr>
           <a:xfrm>
-            <a:off x="548640" y="1691640"/>
-            <a:ext cx="11064240" cy="1371600"/>
+            <a:off x="7589520" y="1737360"/>
+            <a:ext cx="3931920" cy="1188720"/>
           </a:xfrm>
           <a:prstGeom prst="rect">
             <a:avLst/>
@@ -7258,75 +7618,59 @@
               </a:spcAft>
             </a:pPr>
             <a:r>
-              <a:rPr sz="1200" b="1">
+              <a:rPr sz="1100" b="0">
+                <a:solidFill>
+                  <a:srgbClr val="94A3B8"/>
+                </a:solidFill>
+                <a:latin typeface="Calibri"/>
+              </a:rPr>
+              <a:t>Facilities programme</a:t>
+            </a:r>
+          </a:p>
+          <a:p>
+            <a:pPr algn="l">
+              <a:spcAft>
+                <a:spcPts val="200"/>
+              </a:spcAft>
+            </a:pPr>
+            <a:r>
+              <a:rPr sz="3200" b="1">
                 <a:solidFill>
                   <a:srgbClr val="6366F1"/>
                 </a:solidFill>
                 <a:latin typeface="Calibri"/>
               </a:rPr>
-              <a:t>1 · Republish</a:t>
-            </a:r>
-          </a:p>
-          <a:p>
-            <a:pPr algn="l">
-              <a:spcAft>
-                <a:spcPts val="500"/>
+              <a:t>27.6 bn</a:t>
+            </a:r>
+          </a:p>
+          <a:p>
+            <a:pPr algn="l">
+              <a:spcAft>
+                <a:spcPts val="0"/>
               </a:spcAft>
             </a:pPr>
             <a:r>
               <a:rPr sz="1000" b="0">
                 <a:solidFill>
-                  <a:srgbClr val="94A3B8"/>
-                </a:solidFill>
-                <a:latin typeface="Calibri"/>
-              </a:rPr>
-              <a:t>What does the missing data cost?</a:t>
-            </a:r>
-          </a:p>
-          <a:p>
-            <a:pPr algn="l">
-              <a:spcAft>
-                <a:spcPts val="400"/>
-              </a:spcAft>
-            </a:pPr>
-            <a:r>
-              <a:rPr sz="1300" b="1">
-                <a:solidFill>
-                  <a:srgbClr val="0F172A"/>
-                </a:solidFill>
-                <a:latin typeface="Calibri"/>
-              </a:rPr>
-              <a:t>26 fields described and not released</a:t>
-            </a:r>
-          </a:p>
-          <a:p>
-            <a:pPr algn="l">
-              <a:spcAft>
-                <a:spcPts val="0"/>
-              </a:spcAft>
-            </a:pPr>
-            <a:r>
-              <a:rPr sz="950" b="0">
-                <a:solidFill>
                   <a:srgbClr val="475569"/>
                 </a:solidFill>
                 <a:latin typeface="Calibri"/>
               </a:rPr>
-              <a:t>Operating condition, flow rate, depth and maintenance company appear in the producer's dictionary: they are collected. The cost is that of an export, not a survey.</a:t>
-            </a:r>
-          </a:p>
-        </p:txBody>
-      </p:sp>
-      <p:sp>
-        <p:nvSpPr>
-          <p:cNvPr id="5" name="TextBox 4"/>
+              <a:t>1,651 facilities over 5 years, 1 per 5,000 people</a:t>
+            </a:r>
+          </a:p>
+        </p:txBody>
+      </p:sp>
+      <p:sp>
+        <p:nvSpPr>
+          <p:cNvPr id="6" name="TextBox 5"/>
           <p:cNvSpPr txBox="1"/>
           <p:nvPr/>
         </p:nvSpPr>
         <p:spPr>
           <a:xfrm>
-            <a:off x="548640" y="3200400"/>
-            <a:ext cx="11064240" cy="1371600"/>
+            <a:off x="7589520" y="3063240"/>
+            <a:ext cx="3931920" cy="1188720"/>
           </a:xfrm>
           <a:prstGeom prst="rect">
             <a:avLst/>
@@ -7345,75 +7689,59 @@
               </a:spcAft>
             </a:pPr>
             <a:r>
-              <a:rPr sz="1200" b="1">
-                <a:solidFill>
-                  <a:srgbClr val="6366F1"/>
-                </a:solidFill>
-                <a:latin typeface="Calibri"/>
-              </a:rPr>
-              <a:t>2 · Extend the inventory</a:t>
-            </a:r>
-          </a:p>
-          <a:p>
-            <a:pPr algn="l">
-              <a:spcAft>
-                <a:spcPts val="500"/>
+              <a:rPr sz="1100" b="0">
+                <a:solidFill>
+                  <a:srgbClr val="94A3B8"/>
+                </a:solidFill>
+                <a:latin typeface="Calibri"/>
+              </a:rPr>
+              <a:t>Flood programme</a:t>
+            </a:r>
+          </a:p>
+          <a:p>
+            <a:pPr algn="l">
+              <a:spcAft>
+                <a:spcPts val="200"/>
+              </a:spcAft>
+            </a:pPr>
+            <a:r>
+              <a:rPr sz="3200" b="1">
+                <a:solidFill>
+                  <a:srgbClr val="D03B3B"/>
+                </a:solidFill>
+                <a:latin typeface="Calibri"/>
+              </a:rPr>
+              <a:t>4.2 bn</a:t>
+            </a:r>
+          </a:p>
+          <a:p>
+            <a:pPr algn="l">
+              <a:spcAft>
+                <a:spcPts val="0"/>
               </a:spcAft>
             </a:pPr>
             <a:r>
               <a:rPr sz="1000" b="0">
                 <a:solidFill>
-                  <a:srgbClr val="94A3B8"/>
-                </a:solidFill>
-                <a:latin typeface="Calibri"/>
-              </a:rPr>
-              <a:t>Where to record first?</a:t>
-            </a:r>
-          </a:p>
-          <a:p>
-            <a:pPr algn="l">
-              <a:spcAft>
-                <a:spcPts val="400"/>
-              </a:spcAft>
-            </a:pPr>
-            <a:r>
-              <a:rPr sz="1300" b="1">
-                <a:solidFill>
-                  <a:srgbClr val="0F172A"/>
-                </a:solidFill>
-                <a:latin typeface="Calibri"/>
-              </a:rPr>
-              <a:t>12 exposed and uncovered cantons</a:t>
-            </a:r>
-          </a:p>
-          <a:p>
-            <a:pPr algn="l">
-              <a:spcAft>
-                <a:spcPts val="0"/>
-              </a:spcAft>
-            </a:pPr>
-            <a:r>
-              <a:rPr sz="950" b="0">
-                <a:solidFill>
                   <a:srgbClr val="475569"/>
                 </a:solidFill>
                 <a:latin typeface="Calibri"/>
               </a:rPr>
-              <a:t>Recording what exists precedes any construction: no borehole can be decided where existing works are unknown. The cost is that of a field campaign.</a:t>
-            </a:r>
-          </a:p>
-        </p:txBody>
-      </p:sp>
-      <p:sp>
-        <p:nvSpPr>
-          <p:cNvPr id="6" name="TextBox 5"/>
+              <a:t>17 cantons over 3 years · 250.0 M FCFA per works, an ASSUMED cost</a:t>
+            </a:r>
+          </a:p>
+        </p:txBody>
+      </p:sp>
+      <p:sp>
+        <p:nvSpPr>
+          <p:cNvPr id="7" name="TextBox 6"/>
           <p:cNvSpPr txBox="1"/>
           <p:nvPr/>
         </p:nvSpPr>
         <p:spPr>
           <a:xfrm>
-            <a:off x="548640" y="4709160"/>
-            <a:ext cx="11064240" cy="1371600"/>
+            <a:off x="7589520" y="4389120"/>
+            <a:ext cx="3931920" cy="1554480"/>
           </a:xfrm>
           <a:prstGeom prst="rect">
             <a:avLst/>
@@ -7438,7 +7766,7 @@
                 </a:solidFill>
                 <a:latin typeface="Calibri"/>
               </a:rPr>
-              <a:t>3 · Build</a:t>
+              <a:t>Upkeep, the forgotten line</a:t>
             </a:r>
           </a:p>
           <a:p>
@@ -7454,7 +7782,7 @@
                 </a:solidFill>
                 <a:latin typeface="Calibri"/>
               </a:rPr>
-              <a:t>At what order of magnitude?</a:t>
+              <a:t>What does the stock cost once delivered?</a:t>
             </a:r>
           </a:p>
           <a:p>
@@ -7470,7 +7798,7 @@
                 </a:solidFill>
                 <a:latin typeface="Calibri"/>
               </a:rPr>
-              <a:t>21,202 CFA per direct beneficiary</a:t>
+              <a:t>11% of investment, at the observed rate</a:t>
             </a:r>
           </a:p>
           <a:p>
@@ -7486,14 +7814,14 @@
                 </a:solidFill>
                 <a:latin typeface="Calibri"/>
               </a:rPr>
-              <a:t>Median observed across the COSO stock. Since a facility's cost does not depend on the population it serves, siting in a dense area mechanically divides this ratio.</a:t>
-            </a:r>
-          </a:p>
-        </p:txBody>
-      </p:sp>
-      <p:sp>
-        <p:nvSpPr>
-          <p:cNvPr id="7" name="TextBox 6"/>
+              <a:t>COSO sets aside 1.35% of a facility's cost for upkeep. At the usual three to eight percent, the cumulative charge would reach 64% of the investment by the horizon. A stock built without upkeep stops working — and stopping is exactly what the corpus cannot show.</a:t>
+            </a:r>
+          </a:p>
+        </p:txBody>
+      </p:sp>
+      <p:sp>
+        <p:nvSpPr>
+          <p:cNvPr id="8" name="TextBox 7"/>
           <p:cNvSpPr txBox="1"/>
           <p:nvPr/>
         </p:nvSpPr>

--- a/Togo-environnement-hydrolique/rapport/Togo_Water_Sanitation_Report.pptx
+++ b/Togo-environnement-hydrolique/rapport/Togo_Water_Sanitation_Report.pptx
@@ -141,6 +141,7 @@
       <c:barChart>
         <c:barDir val="bar"/>
         <c:grouping val="clustered"/>
+        <c:varyColors val="0"/>
         <c:ser>
           <c:idx val="0"/>
           <c:order val="0"/>
@@ -155,6 +156,14 @@
               </c:strCache>
             </c:strRef>
           </c:tx>
+          <c:spPr>
+            <a:solidFill>
+              <a:srgbClr val="2A78D6"/>
+            </a:solidFill>
+            <a:ln>
+              <a:noFill/>
+            </a:ln>
+          </c:spPr>
           <c:cat>
             <c:strRef>
               <c:f>Sheet1!$A$2:$A$4</c:f>
@@ -272,6 +281,7 @@
       <c:barChart>
         <c:barDir val="bar"/>
         <c:grouping val="clustered"/>
+        <c:varyColors val="0"/>
         <c:ser>
           <c:idx val="0"/>
           <c:order val="0"/>
@@ -286,6 +296,14 @@
               </c:strCache>
             </c:strRef>
           </c:tx>
+          <c:spPr>
+            <a:solidFill>
+              <a:srgbClr val="2A78D6"/>
+            </a:solidFill>
+            <a:ln>
+              <a:noFill/>
+            </a:ln>
+          </c:spPr>
           <c:cat>
             <c:strRef>
               <c:f>Sheet1!$A$2:$A$4</c:f>
@@ -403,6 +421,7 @@
       <c:barChart>
         <c:barDir val="bar"/>
         <c:grouping val="clustered"/>
+        <c:varyColors val="0"/>
         <c:ser>
           <c:idx val="0"/>
           <c:order val="0"/>
@@ -417,6 +436,14 @@
               </c:strCache>
             </c:strRef>
           </c:tx>
+          <c:spPr>
+            <a:solidFill>
+              <a:srgbClr val="2A78D6"/>
+            </a:solidFill>
+            <a:ln>
+              <a:noFill/>
+            </a:ln>
+          </c:spPr>
           <c:cat>
             <c:strRef>
               <c:f>Sheet1!$A$2:$A$6</c:f>
@@ -546,6 +573,7 @@
       <c:barChart>
         <c:barDir val="bar"/>
         <c:grouping val="clustered"/>
+        <c:varyColors val="0"/>
         <c:ser>
           <c:idx val="0"/>
           <c:order val="0"/>
@@ -560,6 +588,14 @@
               </c:strCache>
             </c:strRef>
           </c:tx>
+          <c:spPr>
+            <a:solidFill>
+              <a:srgbClr val="2A78D6"/>
+            </a:solidFill>
+            <a:ln>
+              <a:noFill/>
+            </a:ln>
+          </c:spPr>
           <c:cat>
             <c:strRef>
               <c:f>Sheet1!$A$2:$A$6</c:f>
@@ -689,6 +725,7 @@
       <c:barChart>
         <c:barDir val="bar"/>
         <c:grouping val="clustered"/>
+        <c:varyColors val="0"/>
         <c:ser>
           <c:idx val="0"/>
           <c:order val="0"/>
@@ -703,6 +740,14 @@
               </c:strCache>
             </c:strRef>
           </c:tx>
+          <c:spPr>
+            <a:solidFill>
+              <a:srgbClr val="2A78D6"/>
+            </a:solidFill>
+            <a:ln>
+              <a:noFill/>
+            </a:ln>
+          </c:spPr>
           <c:cat>
             <c:strRef>
               <c:f>Sheet1!$A$2:$A$6</c:f>
@@ -832,6 +877,7 @@
       <c:barChart>
         <c:barDir val="bar"/>
         <c:grouping val="clustered"/>
+        <c:varyColors val="0"/>
         <c:ser>
           <c:idx val="0"/>
           <c:order val="0"/>
@@ -846,6 +892,14 @@
               </c:strCache>
             </c:strRef>
           </c:tx>
+          <c:spPr>
+            <a:solidFill>
+              <a:srgbClr val="2A78D6"/>
+            </a:solidFill>
+            <a:ln>
+              <a:noFill/>
+            </a:ln>
+          </c:spPr>
           <c:cat>
             <c:strRef>
               <c:f>Sheet1!$A$2:$A$4</c:f>
@@ -963,6 +1017,7 @@
       <c:barChart>
         <c:barDir val="bar"/>
         <c:grouping val="clustered"/>
+        <c:varyColors val="0"/>
         <c:ser>
           <c:idx val="0"/>
           <c:order val="0"/>
@@ -977,6 +1032,14 @@
               </c:strCache>
             </c:strRef>
           </c:tx>
+          <c:spPr>
+            <a:solidFill>
+              <a:srgbClr val="2A78D6"/>
+            </a:solidFill>
+            <a:ln>
+              <a:noFill/>
+            </a:ln>
+          </c:spPr>
           <c:cat>
             <c:strRef>
               <c:f>Sheet1!$A$2:$A$6</c:f>
